--- a/thinqreal/fieldcheck/FieldCheck_진행보고_20260802.pptx
+++ b/thinqreal/fieldcheck/FieldCheck_진행보고_20260802.pptx
@@ -2458,7 +2458,7 @@
                 <a:ea typeface="맑은 고딕" pitchFamily="34" charset="-122"/>
                 <a:cs typeface="맑은 고딕" pitchFamily="34" charset="-120"/>
               </a:rPr>
-              <a:t>가장 위험했던 사례 — 점검 장비가 스스로를 속인 경우</a:t>
+              <a:t>자가 진단 설계 — 점검 장비 이상의 오보 방지</a:t>
             </a:r>
             <a:endParaRPr lang="en-US" sz="3200" dirty="0"/>
           </a:p>
@@ -3161,7 +3161,7 @@
                 <a:ea typeface="맑은 고딕" pitchFamily="34" charset="-122"/>
                 <a:cs typeface="맑은 고딕" pitchFamily="34" charset="-120"/>
               </a:rPr>
-              <a:t>검증 결과 (실측)</a:t>
+              <a:t>현장 검증 결과</a:t>
             </a:r>
             <a:endParaRPr lang="en-US" sz="3200" dirty="0"/>
           </a:p>
@@ -3200,7 +3200,7 @@
                 <a:ea typeface="맑은 고딕" pitchFamily="34" charset="-122"/>
                 <a:cs typeface="맑은 고딕" pitchFamily="34" charset="-120"/>
               </a:rPr>
-              <a:t>2026-08-01 L1+L2 통합 판정 · 2026-08-02 자동 실행</a:t>
+              <a:t>2026-08-01 L1+L2 통합 판정 · 2026-08-02 07:30 자동 실행</a:t>
             </a:r>
             <a:endParaRPr lang="en-US" sz="1400" dirty="0"/>
           </a:p>
@@ -3790,8 +3790,8 @@
         </p:nvSpPr>
         <p:spPr>
           <a:xfrm>
-            <a:off x="640080" y="3035808"/>
-            <a:ext cx="7315200" cy="320040"/>
+            <a:off x="640080" y="3017520"/>
+            <a:ext cx="10881360" cy="320040"/>
           </a:xfrm>
           <a:prstGeom prst="rect">
             <a:avLst/>
@@ -3815,7 +3815,49 @@
                 <a:ea typeface="맑은 고딕" pitchFamily="34" charset="-122"/>
                 <a:cs typeface="맑은 고딕" pitchFamily="34" charset="-120"/>
               </a:rPr>
-              <a:t>실제 인식 결과 — 로컬 STT가 받아쓴 ThinQ ON의 답변</a:t>
+              <a:t>실측 상세 — </a:t>
+            </a:r>
+            <a:pPr indent="0" marL="0">
+              <a:buNone/>
+            </a:pPr>
+            <a:r>
+              <a:rPr lang="en-US" sz="1400" dirty="0">
+                <a:solidFill>
+                  <a:srgbClr val="6E786B"/>
+                </a:solidFill>
+                <a:latin typeface="맑은 고딕" pitchFamily="34" charset="0"/>
+                <a:ea typeface="맑은 고딕" pitchFamily="34" charset="-122"/>
+                <a:cs typeface="맑은 고딕" pitchFamily="34" charset="-120"/>
+              </a:rPr>
+              <a:t>응답 시간의 차이는 성능 편차가 아니라 </a:t>
+            </a:r>
+            <a:pPr indent="0" marL="0">
+              <a:buNone/>
+            </a:pPr>
+            <a:r>
+              <a:rPr lang="en-US" sz="1400" b="1" dirty="0">
+                <a:solidFill>
+                  <a:srgbClr val="3A5035"/>
+                </a:solidFill>
+                <a:latin typeface="맑은 고딕" pitchFamily="34" charset="0"/>
+                <a:ea typeface="맑은 고딕" pitchFamily="34" charset="-122"/>
+                <a:cs typeface="맑은 고딕" pitchFamily="34" charset="-120"/>
+              </a:rPr>
+              <a:t>처리 경로의 차이</a:t>
+            </a:r>
+            <a:pPr indent="0" marL="0">
+              <a:buNone/>
+            </a:pPr>
+            <a:r>
+              <a:rPr lang="en-US" sz="1400" dirty="0">
+                <a:solidFill>
+                  <a:srgbClr val="6E786B"/>
+                </a:solidFill>
+                <a:latin typeface="맑은 고딕" pitchFamily="34" charset="0"/>
+                <a:ea typeface="맑은 고딕" pitchFamily="34" charset="-122"/>
+                <a:cs typeface="맑은 고딕" pitchFamily="34" charset="-120"/>
+              </a:rPr>
+              <a:t>입니다</a:t>
             </a:r>
             <a:endParaRPr lang="en-US" sz="1400" dirty="0"/>
           </a:p>
@@ -3830,7 +3872,7 @@
         <p:spPr>
           <a:xfrm>
             <a:off x="822960" y="3401568"/>
-            <a:ext cx="2926080" cy="274320"/>
+            <a:ext cx="1645920" cy="274320"/>
           </a:xfrm>
           <a:prstGeom prst="rect">
             <a:avLst/>
@@ -3868,8 +3910,8 @@
         </p:nvSpPr>
         <p:spPr>
           <a:xfrm>
-            <a:off x="4160520" y="3401568"/>
-            <a:ext cx="1188720" cy="274320"/>
+            <a:off x="2788920" y="3401568"/>
+            <a:ext cx="2788920" cy="274320"/>
           </a:xfrm>
           <a:prstGeom prst="rect">
             <a:avLst/>
@@ -3893,6 +3935,45 @@
                 <a:ea typeface="맑은 고딕" pitchFamily="34" charset="-122"/>
                 <a:cs typeface="맑은 고딕" pitchFamily="34" charset="-120"/>
               </a:rPr>
+              <a:t>추정 처리 경로</a:t>
+            </a:r>
+            <a:endParaRPr lang="en-US" sz="1150" dirty="0"/>
+          </a:p>
+        </p:txBody>
+      </p:sp>
+      <p:sp>
+        <p:nvSpPr>
+          <p:cNvPr id="23" name="Text 21"/>
+          <p:cNvSpPr/>
+          <p:nvPr/>
+        </p:nvSpPr>
+        <p:spPr>
+          <a:xfrm>
+            <a:off x="5897880" y="3401568"/>
+            <a:ext cx="1097280" cy="274320"/>
+          </a:xfrm>
+          <a:prstGeom prst="rect">
+            <a:avLst/>
+          </a:prstGeom>
+          <a:noFill/>
+          <a:ln/>
+        </p:spPr>
+        <p:txBody>
+          <a:bodyPr wrap="square" lIns="0" tIns="0" rIns="0" bIns="0" rtlCol="0" anchor="ctr"/>
+          <a:lstStyle/>
+          <a:p>
+            <a:pPr indent="0" marL="0">
+              <a:buNone/>
+            </a:pPr>
+            <a:r>
+              <a:rPr lang="en-US" sz="1150" b="1" dirty="0">
+                <a:solidFill>
+                  <a:srgbClr val="6E786B"/>
+                </a:solidFill>
+                <a:latin typeface="맑은 고딕" pitchFamily="34" charset="0"/>
+                <a:ea typeface="맑은 고딕" pitchFamily="34" charset="-122"/>
+                <a:cs typeface="맑은 고딕" pitchFamily="34" charset="-120"/>
+              </a:rPr>
               <a:t>응답 시작</a:t>
             </a:r>
             <a:endParaRPr lang="en-US" sz="1150" dirty="0"/>
@@ -3901,14 +3982,14 @@
       </p:sp>
       <p:sp>
         <p:nvSpPr>
-          <p:cNvPr id="23" name="Text 21"/>
-          <p:cNvSpPr/>
-          <p:nvPr/>
-        </p:nvSpPr>
-        <p:spPr>
-          <a:xfrm>
-            <a:off x="5760720" y="3401568"/>
-            <a:ext cx="4434840" cy="274320"/>
+          <p:cNvPr id="24" name="Text 22"/>
+          <p:cNvSpPr/>
+          <p:nvPr/>
+        </p:nvSpPr>
+        <p:spPr>
+          <a:xfrm>
+            <a:off x="7315200" y="3401568"/>
+            <a:ext cx="3017520" cy="274320"/>
           </a:xfrm>
           <a:prstGeom prst="rect">
             <a:avLst/>
@@ -3940,14 +4021,14 @@
       </p:sp>
       <p:sp>
         <p:nvSpPr>
-          <p:cNvPr id="24" name="Text 22"/>
-          <p:cNvSpPr/>
-          <p:nvPr/>
-        </p:nvSpPr>
-        <p:spPr>
-          <a:xfrm>
-            <a:off x="10607040" y="3401568"/>
-            <a:ext cx="822960" cy="274320"/>
+          <p:cNvPr id="25" name="Text 23"/>
+          <p:cNvSpPr/>
+          <p:nvPr/>
+        </p:nvSpPr>
+        <p:spPr>
+          <a:xfrm>
+            <a:off x="10652760" y="3401568"/>
+            <a:ext cx="777240" cy="274320"/>
           </a:xfrm>
           <a:prstGeom prst="rect">
             <a:avLst/>
@@ -3979,7 +4060,7 @@
       </p:sp>
       <p:sp>
         <p:nvSpPr>
-          <p:cNvPr id="25" name="Shape 23"/>
+          <p:cNvPr id="26" name="Shape 24"/>
           <p:cNvSpPr/>
           <p:nvPr/>
         </p:nvSpPr>
@@ -4006,14 +4087,92 @@
       </p:sp>
       <p:sp>
         <p:nvSpPr>
-          <p:cNvPr id="26" name="Text 24"/>
+          <p:cNvPr id="27" name="Text 25"/>
           <p:cNvSpPr/>
           <p:nvPr/>
         </p:nvSpPr>
         <p:spPr>
           <a:xfrm>
             <a:off x="822960" y="3730752"/>
-            <a:ext cx="3017520" cy="548640"/>
+            <a:ext cx="1783080" cy="548640"/>
+          </a:xfrm>
+          <a:prstGeom prst="rect">
+            <a:avLst/>
+          </a:prstGeom>
+          <a:noFill/>
+          <a:ln/>
+        </p:spPr>
+        <p:txBody>
+          <a:bodyPr wrap="square" lIns="0" tIns="0" rIns="0" bIns="0" rtlCol="0" anchor="ctr"/>
+          <a:lstStyle/>
+          <a:p>
+            <a:pPr indent="0" marL="0">
+              <a:buNone/>
+            </a:pPr>
+            <a:r>
+              <a:rPr lang="en-US" sz="1250" b="1" dirty="0">
+                <a:solidFill>
+                  <a:srgbClr val="1F2420"/>
+                </a:solidFill>
+                <a:latin typeface="맑은 고딕" pitchFamily="34" charset="0"/>
+                <a:ea typeface="맑은 고딕" pitchFamily="34" charset="-122"/>
+                <a:cs typeface="맑은 고딕" pitchFamily="34" charset="-120"/>
+              </a:rPr>
+              <a:t>시간 질문</a:t>
+            </a:r>
+            <a:endParaRPr lang="en-US" sz="1250" dirty="0"/>
+          </a:p>
+        </p:txBody>
+      </p:sp>
+      <p:sp>
+        <p:nvSpPr>
+          <p:cNvPr id="28" name="Text 26"/>
+          <p:cNvSpPr/>
+          <p:nvPr/>
+        </p:nvSpPr>
+        <p:spPr>
+          <a:xfrm>
+            <a:off x="2788920" y="3730752"/>
+            <a:ext cx="2880360" cy="548640"/>
+          </a:xfrm>
+          <a:prstGeom prst="rect">
+            <a:avLst/>
+          </a:prstGeom>
+          <a:noFill/>
+          <a:ln/>
+        </p:spPr>
+        <p:txBody>
+          <a:bodyPr wrap="square" lIns="0" tIns="0" rIns="0" bIns="0" rtlCol="0" anchor="ctr"/>
+          <a:lstStyle/>
+          <a:p>
+            <a:pPr indent="0" marL="0">
+              <a:buNone/>
+            </a:pPr>
+            <a:r>
+              <a:rPr lang="en-US" sz="1150" dirty="0">
+                <a:solidFill>
+                  <a:srgbClr val="1F2420"/>
+                </a:solidFill>
+                <a:latin typeface="맑은 고딕" pitchFamily="34" charset="0"/>
+                <a:ea typeface="맑은 고딕" pitchFamily="34" charset="-122"/>
+                <a:cs typeface="맑은 고딕" pitchFamily="34" charset="-120"/>
+              </a:rPr>
+              <a:t>기기 내 즉답 — AI 엔진 미호출</a:t>
+            </a:r>
+            <a:endParaRPr lang="en-US" sz="1150" dirty="0"/>
+          </a:p>
+        </p:txBody>
+      </p:sp>
+      <p:sp>
+        <p:nvSpPr>
+          <p:cNvPr id="29" name="Text 27"/>
+          <p:cNvSpPr/>
+          <p:nvPr/>
+        </p:nvSpPr>
+        <p:spPr>
+          <a:xfrm>
+            <a:off x="5897880" y="3730752"/>
+            <a:ext cx="1188720" cy="548640"/>
           </a:xfrm>
           <a:prstGeom prst="rect">
             <a:avLst/>
@@ -4031,13 +4190,13 @@
             <a:r>
               <a:rPr lang="en-US" sz="1300" b="1" dirty="0">
                 <a:solidFill>
-                  <a:srgbClr val="1F2420"/>
-                </a:solidFill>
-                <a:latin typeface="맑은 고딕" pitchFamily="34" charset="0"/>
-                <a:ea typeface="맑은 고딕" pitchFamily="34" charset="-122"/>
-                <a:cs typeface="맑은 고딕" pitchFamily="34" charset="-120"/>
-              </a:rPr>
-              <a:t>시간 질문</a:t>
+                  <a:srgbClr val="3A5035"/>
+                </a:solidFill>
+                <a:latin typeface="맑은 고딕" pitchFamily="34" charset="0"/>
+                <a:ea typeface="맑은 고딕" pitchFamily="34" charset="-122"/>
+                <a:cs typeface="맑은 고딕" pitchFamily="34" charset="-120"/>
+              </a:rPr>
+              <a:t>150 ms</a:t>
             </a:r>
             <a:endParaRPr lang="en-US" sz="1300" dirty="0"/>
           </a:p>
@@ -4045,14 +4204,53 @@
       </p:sp>
       <p:sp>
         <p:nvSpPr>
-          <p:cNvPr id="27" name="Text 25"/>
-          <p:cNvSpPr/>
-          <p:nvPr/>
-        </p:nvSpPr>
-        <p:spPr>
-          <a:xfrm>
-            <a:off x="4160520" y="3730752"/>
-            <a:ext cx="1280160" cy="548640"/>
+          <p:cNvPr id="30" name="Text 28"/>
+          <p:cNvSpPr/>
+          <p:nvPr/>
+        </p:nvSpPr>
+        <p:spPr>
+          <a:xfrm>
+            <a:off x="7315200" y="3730752"/>
+            <a:ext cx="3108960" cy="548640"/>
+          </a:xfrm>
+          <a:prstGeom prst="rect">
+            <a:avLst/>
+          </a:prstGeom>
+          <a:noFill/>
+          <a:ln/>
+        </p:spPr>
+        <p:txBody>
+          <a:bodyPr wrap="square" lIns="0" tIns="0" rIns="0" bIns="0" rtlCol="0" anchor="ctr"/>
+          <a:lstStyle/>
+          <a:p>
+            <a:pPr indent="0" marL="0">
+              <a:buNone/>
+            </a:pPr>
+            <a:r>
+              <a:rPr lang="en-US" sz="1100" dirty="0">
+                <a:solidFill>
+                  <a:srgbClr val="6E786B"/>
+                </a:solidFill>
+                <a:latin typeface="맑은 고딕" pitchFamily="34" charset="0"/>
+                <a:ea typeface="맑은 고딕" pitchFamily="34" charset="-122"/>
+                <a:cs typeface="맑은 고딕" pitchFamily="34" charset="-120"/>
+              </a:rPr>
+              <a:t>"지금은 9시 33분이에요"</a:t>
+            </a:r>
+            <a:endParaRPr lang="en-US" sz="1100" dirty="0"/>
+          </a:p>
+        </p:txBody>
+      </p:sp>
+      <p:sp>
+        <p:nvSpPr>
+          <p:cNvPr id="31" name="Text 29"/>
+          <p:cNvSpPr/>
+          <p:nvPr/>
+        </p:nvSpPr>
+        <p:spPr>
+          <a:xfrm>
+            <a:off x="10652760" y="3730752"/>
+            <a:ext cx="777240" cy="548640"/>
           </a:xfrm>
           <a:prstGeom prst="rect">
             <a:avLst/>
@@ -4076,7 +4274,7 @@
                 <a:ea typeface="맑은 고딕" pitchFamily="34" charset="-122"/>
                 <a:cs typeface="맑은 고딕" pitchFamily="34" charset="-120"/>
               </a:rPr>
-              <a:t>150 ms</a:t>
+              <a:t>통과</a:t>
             </a:r>
             <a:endParaRPr lang="en-US" sz="1300" dirty="0"/>
           </a:p>
@@ -4084,85 +4282,7 @@
       </p:sp>
       <p:sp>
         <p:nvSpPr>
-          <p:cNvPr id="28" name="Text 26"/>
-          <p:cNvSpPr/>
-          <p:nvPr/>
-        </p:nvSpPr>
-        <p:spPr>
-          <a:xfrm>
-            <a:off x="5760720" y="3730752"/>
-            <a:ext cx="4526280" cy="548640"/>
-          </a:xfrm>
-          <a:prstGeom prst="rect">
-            <a:avLst/>
-          </a:prstGeom>
-          <a:noFill/>
-          <a:ln/>
-        </p:spPr>
-        <p:txBody>
-          <a:bodyPr wrap="square" lIns="0" tIns="0" rIns="0" bIns="0" rtlCol="0" anchor="ctr"/>
-          <a:lstStyle/>
-          <a:p>
-            <a:pPr indent="0" marL="0">
-              <a:buNone/>
-            </a:pPr>
-            <a:r>
-              <a:rPr lang="en-US" sz="1250" dirty="0">
-                <a:solidFill>
-                  <a:srgbClr val="6E786B"/>
-                </a:solidFill>
-                <a:latin typeface="맑은 고딕" pitchFamily="34" charset="0"/>
-                <a:ea typeface="맑은 고딕" pitchFamily="34" charset="-122"/>
-                <a:cs typeface="맑은 고딕" pitchFamily="34" charset="-120"/>
-              </a:rPr>
-              <a:t>"지금은 9시 33분이에요"</a:t>
-            </a:r>
-            <a:endParaRPr lang="en-US" sz="1250" dirty="0"/>
-          </a:p>
-        </p:txBody>
-      </p:sp>
-      <p:sp>
-        <p:nvSpPr>
-          <p:cNvPr id="29" name="Text 27"/>
-          <p:cNvSpPr/>
-          <p:nvPr/>
-        </p:nvSpPr>
-        <p:spPr>
-          <a:xfrm>
-            <a:off x="10607040" y="3730752"/>
-            <a:ext cx="822960" cy="548640"/>
-          </a:xfrm>
-          <a:prstGeom prst="rect">
-            <a:avLst/>
-          </a:prstGeom>
-          <a:noFill/>
-          <a:ln/>
-        </p:spPr>
-        <p:txBody>
-          <a:bodyPr wrap="square" lIns="0" tIns="0" rIns="0" bIns="0" rtlCol="0" anchor="ctr"/>
-          <a:lstStyle/>
-          <a:p>
-            <a:pPr indent="0" marL="0">
-              <a:buNone/>
-            </a:pPr>
-            <a:r>
-              <a:rPr lang="en-US" sz="1300" b="1" dirty="0">
-                <a:solidFill>
-                  <a:srgbClr val="3A5035"/>
-                </a:solidFill>
-                <a:latin typeface="맑은 고딕" pitchFamily="34" charset="0"/>
-                <a:ea typeface="맑은 고딕" pitchFamily="34" charset="-122"/>
-                <a:cs typeface="맑은 고딕" pitchFamily="34" charset="-120"/>
-              </a:rPr>
-              <a:t>통과</a:t>
-            </a:r>
-            <a:endParaRPr lang="en-US" sz="1300" dirty="0"/>
-          </a:p>
-        </p:txBody>
-      </p:sp>
-      <p:sp>
-        <p:nvSpPr>
-          <p:cNvPr id="30" name="Shape 28"/>
+          <p:cNvPr id="32" name="Shape 30"/>
           <p:cNvSpPr/>
           <p:nvPr/>
         </p:nvSpPr>
@@ -4189,14 +4309,92 @@
       </p:sp>
       <p:sp>
         <p:nvSpPr>
-          <p:cNvPr id="31" name="Text 29"/>
+          <p:cNvPr id="33" name="Text 31"/>
           <p:cNvSpPr/>
           <p:nvPr/>
         </p:nvSpPr>
         <p:spPr>
           <a:xfrm>
             <a:off x="822960" y="4389120"/>
-            <a:ext cx="3017520" cy="548640"/>
+            <a:ext cx="1783080" cy="548640"/>
+          </a:xfrm>
+          <a:prstGeom prst="rect">
+            <a:avLst/>
+          </a:prstGeom>
+          <a:noFill/>
+          <a:ln/>
+        </p:spPr>
+        <p:txBody>
+          <a:bodyPr wrap="square" lIns="0" tIns="0" rIns="0" bIns="0" rtlCol="0" anchor="ctr"/>
+          <a:lstStyle/>
+          <a:p>
+            <a:pPr indent="0" marL="0">
+              <a:buNone/>
+            </a:pPr>
+            <a:r>
+              <a:rPr lang="en-US" sz="1250" b="1" dirty="0">
+                <a:solidFill>
+                  <a:srgbClr val="1F2420"/>
+                </a:solidFill>
+                <a:latin typeface="맑은 고딕" pitchFamily="34" charset="0"/>
+                <a:ea typeface="맑은 고딕" pitchFamily="34" charset="-122"/>
+                <a:cs typeface="맑은 고딕" pitchFamily="34" charset="-120"/>
+              </a:rPr>
+              <a:t>일상 대화</a:t>
+            </a:r>
+            <a:endParaRPr lang="en-US" sz="1250" dirty="0"/>
+          </a:p>
+        </p:txBody>
+      </p:sp>
+      <p:sp>
+        <p:nvSpPr>
+          <p:cNvPr id="34" name="Text 32"/>
+          <p:cNvSpPr/>
+          <p:nvPr/>
+        </p:nvSpPr>
+        <p:spPr>
+          <a:xfrm>
+            <a:off x="2788920" y="4389120"/>
+            <a:ext cx="2880360" cy="548640"/>
+          </a:xfrm>
+          <a:prstGeom prst="rect">
+            <a:avLst/>
+          </a:prstGeom>
+          <a:noFill/>
+          <a:ln/>
+        </p:spPr>
+        <p:txBody>
+          <a:bodyPr wrap="square" lIns="0" tIns="0" rIns="0" bIns="0" rtlCol="0" anchor="ctr"/>
+          <a:lstStyle/>
+          <a:p>
+            <a:pPr indent="0" marL="0">
+              <a:buNone/>
+            </a:pPr>
+            <a:r>
+              <a:rPr lang="en-US" sz="1150" dirty="0">
+                <a:solidFill>
+                  <a:srgbClr val="1F2420"/>
+                </a:solidFill>
+                <a:latin typeface="맑은 고딕" pitchFamily="34" charset="0"/>
+                <a:ea typeface="맑은 고딕" pitchFamily="34" charset="-122"/>
+                <a:cs typeface="맑은 고딕" pitchFamily="34" charset="-120"/>
+              </a:rPr>
+              <a:t>생성 엔진 경유</a:t>
+            </a:r>
+            <a:endParaRPr lang="en-US" sz="1150" dirty="0"/>
+          </a:p>
+        </p:txBody>
+      </p:sp>
+      <p:sp>
+        <p:nvSpPr>
+          <p:cNvPr id="35" name="Text 33"/>
+          <p:cNvSpPr/>
+          <p:nvPr/>
+        </p:nvSpPr>
+        <p:spPr>
+          <a:xfrm>
+            <a:off x="5897880" y="4389120"/>
+            <a:ext cx="1188720" cy="548640"/>
           </a:xfrm>
           <a:prstGeom prst="rect">
             <a:avLst/>
@@ -4214,13 +4412,13 @@
             <a:r>
               <a:rPr lang="en-US" sz="1300" b="1" dirty="0">
                 <a:solidFill>
-                  <a:srgbClr val="1F2420"/>
-                </a:solidFill>
-                <a:latin typeface="맑은 고딕" pitchFamily="34" charset="0"/>
-                <a:ea typeface="맑은 고딕" pitchFamily="34" charset="-122"/>
-                <a:cs typeface="맑은 고딕" pitchFamily="34" charset="-120"/>
-              </a:rPr>
-              <a:t>일상 대화</a:t>
+                  <a:srgbClr val="3A5035"/>
+                </a:solidFill>
+                <a:latin typeface="맑은 고딕" pitchFamily="34" charset="0"/>
+                <a:ea typeface="맑은 고딕" pitchFamily="34" charset="-122"/>
+                <a:cs typeface="맑은 고딕" pitchFamily="34" charset="-120"/>
+              </a:rPr>
+              <a:t>2,910 ms</a:t>
             </a:r>
             <a:endParaRPr lang="en-US" sz="1300" dirty="0"/>
           </a:p>
@@ -4228,14 +4426,53 @@
       </p:sp>
       <p:sp>
         <p:nvSpPr>
-          <p:cNvPr id="32" name="Text 30"/>
-          <p:cNvSpPr/>
-          <p:nvPr/>
-        </p:nvSpPr>
-        <p:spPr>
-          <a:xfrm>
-            <a:off x="4160520" y="4389120"/>
-            <a:ext cx="1280160" cy="548640"/>
+          <p:cNvPr id="36" name="Text 34"/>
+          <p:cNvSpPr/>
+          <p:nvPr/>
+        </p:nvSpPr>
+        <p:spPr>
+          <a:xfrm>
+            <a:off x="7315200" y="4389120"/>
+            <a:ext cx="3108960" cy="548640"/>
+          </a:xfrm>
+          <a:prstGeom prst="rect">
+            <a:avLst/>
+          </a:prstGeom>
+          <a:noFill/>
+          <a:ln/>
+        </p:spPr>
+        <p:txBody>
+          <a:bodyPr wrap="square" lIns="0" tIns="0" rIns="0" bIns="0" rtlCol="0" anchor="ctr"/>
+          <a:lstStyle/>
+          <a:p>
+            <a:pPr indent="0" marL="0">
+              <a:buNone/>
+            </a:pPr>
+            <a:r>
+              <a:rPr lang="en-US" sz="1100" dirty="0">
+                <a:solidFill>
+                  <a:srgbClr val="6E786B"/>
+                </a:solidFill>
+                <a:latin typeface="맑은 고딕" pitchFamily="34" charset="0"/>
+                <a:ea typeface="맑은 고딕" pitchFamily="34" charset="-122"/>
+                <a:cs typeface="맑은 고딕" pitchFamily="34" charset="-120"/>
+              </a:rPr>
+              <a:t>"저는 항상 기분이 좋아요…"</a:t>
+            </a:r>
+            <a:endParaRPr lang="en-US" sz="1100" dirty="0"/>
+          </a:p>
+        </p:txBody>
+      </p:sp>
+      <p:sp>
+        <p:nvSpPr>
+          <p:cNvPr id="37" name="Text 35"/>
+          <p:cNvSpPr/>
+          <p:nvPr/>
+        </p:nvSpPr>
+        <p:spPr>
+          <a:xfrm>
+            <a:off x="10652760" y="4389120"/>
+            <a:ext cx="777240" cy="548640"/>
           </a:xfrm>
           <a:prstGeom prst="rect">
             <a:avLst/>
@@ -4259,7 +4496,7 @@
                 <a:ea typeface="맑은 고딕" pitchFamily="34" charset="-122"/>
                 <a:cs typeface="맑은 고딕" pitchFamily="34" charset="-120"/>
               </a:rPr>
-              <a:t>2,910 ms</a:t>
+              <a:t>통과</a:t>
             </a:r>
             <a:endParaRPr lang="en-US" sz="1300" dirty="0"/>
           </a:p>
@@ -4267,85 +4504,7 @@
       </p:sp>
       <p:sp>
         <p:nvSpPr>
-          <p:cNvPr id="33" name="Text 31"/>
-          <p:cNvSpPr/>
-          <p:nvPr/>
-        </p:nvSpPr>
-        <p:spPr>
-          <a:xfrm>
-            <a:off x="5760720" y="4389120"/>
-            <a:ext cx="4526280" cy="548640"/>
-          </a:xfrm>
-          <a:prstGeom prst="rect">
-            <a:avLst/>
-          </a:prstGeom>
-          <a:noFill/>
-          <a:ln/>
-        </p:spPr>
-        <p:txBody>
-          <a:bodyPr wrap="square" lIns="0" tIns="0" rIns="0" bIns="0" rtlCol="0" anchor="ctr"/>
-          <a:lstStyle/>
-          <a:p>
-            <a:pPr indent="0" marL="0">
-              <a:buNone/>
-            </a:pPr>
-            <a:r>
-              <a:rPr lang="en-US" sz="1250" dirty="0">
-                <a:solidFill>
-                  <a:srgbClr val="6E786B"/>
-                </a:solidFill>
-                <a:latin typeface="맑은 고딕" pitchFamily="34" charset="0"/>
-                <a:ea typeface="맑은 고딕" pitchFamily="34" charset="-122"/>
-                <a:cs typeface="맑은 고딕" pitchFamily="34" charset="-120"/>
-              </a:rPr>
-              <a:t>"저는 항상 기분이 좋아요…"</a:t>
-            </a:r>
-            <a:endParaRPr lang="en-US" sz="1250" dirty="0"/>
-          </a:p>
-        </p:txBody>
-      </p:sp>
-      <p:sp>
-        <p:nvSpPr>
-          <p:cNvPr id="34" name="Text 32"/>
-          <p:cNvSpPr/>
-          <p:nvPr/>
-        </p:nvSpPr>
-        <p:spPr>
-          <a:xfrm>
-            <a:off x="10607040" y="4389120"/>
-            <a:ext cx="822960" cy="548640"/>
-          </a:xfrm>
-          <a:prstGeom prst="rect">
-            <a:avLst/>
-          </a:prstGeom>
-          <a:noFill/>
-          <a:ln/>
-        </p:spPr>
-        <p:txBody>
-          <a:bodyPr wrap="square" lIns="0" tIns="0" rIns="0" bIns="0" rtlCol="0" anchor="ctr"/>
-          <a:lstStyle/>
-          <a:p>
-            <a:pPr indent="0" marL="0">
-              <a:buNone/>
-            </a:pPr>
-            <a:r>
-              <a:rPr lang="en-US" sz="1300" b="1" dirty="0">
-                <a:solidFill>
-                  <a:srgbClr val="3A5035"/>
-                </a:solidFill>
-                <a:latin typeface="맑은 고딕" pitchFamily="34" charset="0"/>
-                <a:ea typeface="맑은 고딕" pitchFamily="34" charset="-122"/>
-                <a:cs typeface="맑은 고딕" pitchFamily="34" charset="-120"/>
-              </a:rPr>
-              <a:t>통과</a:t>
-            </a:r>
-            <a:endParaRPr lang="en-US" sz="1300" dirty="0"/>
-          </a:p>
-        </p:txBody>
-      </p:sp>
-      <p:sp>
-        <p:nvSpPr>
-          <p:cNvPr id="35" name="Shape 33"/>
+          <p:cNvPr id="38" name="Shape 36"/>
           <p:cNvSpPr/>
           <p:nvPr/>
         </p:nvSpPr>
@@ -4372,14 +4531,92 @@
       </p:sp>
       <p:sp>
         <p:nvSpPr>
-          <p:cNvPr id="36" name="Text 34"/>
+          <p:cNvPr id="39" name="Text 37"/>
           <p:cNvSpPr/>
           <p:nvPr/>
         </p:nvSpPr>
         <p:spPr>
           <a:xfrm>
             <a:off x="822960" y="5047488"/>
-            <a:ext cx="3017520" cy="548640"/>
+            <a:ext cx="1783080" cy="548640"/>
+          </a:xfrm>
+          <a:prstGeom prst="rect">
+            <a:avLst/>
+          </a:prstGeom>
+          <a:noFill/>
+          <a:ln/>
+        </p:spPr>
+        <p:txBody>
+          <a:bodyPr wrap="square" lIns="0" tIns="0" rIns="0" bIns="0" rtlCol="0" anchor="ctr"/>
+          <a:lstStyle/>
+          <a:p>
+            <a:pPr indent="0" marL="0">
+              <a:buNone/>
+            </a:pPr>
+            <a:r>
+              <a:rPr lang="en-US" sz="1250" b="1" dirty="0">
+                <a:solidFill>
+                  <a:srgbClr val="1F2420"/>
+                </a:solidFill>
+                <a:latin typeface="맑은 고딕" pitchFamily="34" charset="0"/>
+                <a:ea typeface="맑은 고딕" pitchFamily="34" charset="-122"/>
+                <a:cs typeface="맑은 고딕" pitchFamily="34" charset="-120"/>
+              </a:rPr>
+              <a:t>날씨</a:t>
+            </a:r>
+            <a:endParaRPr lang="en-US" sz="1250" dirty="0"/>
+          </a:p>
+        </p:txBody>
+      </p:sp>
+      <p:sp>
+        <p:nvSpPr>
+          <p:cNvPr id="40" name="Text 38"/>
+          <p:cNvSpPr/>
+          <p:nvPr/>
+        </p:nvSpPr>
+        <p:spPr>
+          <a:xfrm>
+            <a:off x="2788920" y="5047488"/>
+            <a:ext cx="2880360" cy="548640"/>
+          </a:xfrm>
+          <a:prstGeom prst="rect">
+            <a:avLst/>
+          </a:prstGeom>
+          <a:noFill/>
+          <a:ln/>
+        </p:spPr>
+        <p:txBody>
+          <a:bodyPr wrap="square" lIns="0" tIns="0" rIns="0" bIns="0" rtlCol="0" anchor="ctr"/>
+          <a:lstStyle/>
+          <a:p>
+            <a:pPr indent="0" marL="0">
+              <a:buNone/>
+            </a:pPr>
+            <a:r>
+              <a:rPr lang="en-US" sz="1150" dirty="0">
+                <a:solidFill>
+                  <a:srgbClr val="1F2420"/>
+                </a:solidFill>
+                <a:latin typeface="맑은 고딕" pitchFamily="34" charset="0"/>
+                <a:ea typeface="맑은 고딕" pitchFamily="34" charset="-122"/>
+                <a:cs typeface="맑은 고딕" pitchFamily="34" charset="-120"/>
+              </a:rPr>
+              <a:t>생성 엔진 + 외부 서비스 연동</a:t>
+            </a:r>
+            <a:endParaRPr lang="en-US" sz="1150" dirty="0"/>
+          </a:p>
+        </p:txBody>
+      </p:sp>
+      <p:sp>
+        <p:nvSpPr>
+          <p:cNvPr id="41" name="Text 39"/>
+          <p:cNvSpPr/>
+          <p:nvPr/>
+        </p:nvSpPr>
+        <p:spPr>
+          <a:xfrm>
+            <a:off x="5897880" y="5047488"/>
+            <a:ext cx="1188720" cy="548640"/>
           </a:xfrm>
           <a:prstGeom prst="rect">
             <a:avLst/>
@@ -4397,13 +4634,13 @@
             <a:r>
               <a:rPr lang="en-US" sz="1300" b="1" dirty="0">
                 <a:solidFill>
-                  <a:srgbClr val="1F2420"/>
-                </a:solidFill>
-                <a:latin typeface="맑은 고딕" pitchFamily="34" charset="0"/>
-                <a:ea typeface="맑은 고딕" pitchFamily="34" charset="-122"/>
-                <a:cs typeface="맑은 고딕" pitchFamily="34" charset="-120"/>
-              </a:rPr>
-              <a:t>날씨 (외부 연동)</a:t>
+                  <a:srgbClr val="3A5035"/>
+                </a:solidFill>
+                <a:latin typeface="맑은 고딕" pitchFamily="34" charset="0"/>
+                <a:ea typeface="맑은 고딕" pitchFamily="34" charset="-122"/>
+                <a:cs typeface="맑은 고딕" pitchFamily="34" charset="-120"/>
+              </a:rPr>
+              <a:t>4,620 ms</a:t>
             </a:r>
             <a:endParaRPr lang="en-US" sz="1300" dirty="0"/>
           </a:p>
@@ -4411,14 +4648,53 @@
       </p:sp>
       <p:sp>
         <p:nvSpPr>
-          <p:cNvPr id="37" name="Text 35"/>
-          <p:cNvSpPr/>
-          <p:nvPr/>
-        </p:nvSpPr>
-        <p:spPr>
-          <a:xfrm>
-            <a:off x="4160520" y="5047488"/>
-            <a:ext cx="1280160" cy="548640"/>
+          <p:cNvPr id="42" name="Text 40"/>
+          <p:cNvSpPr/>
+          <p:nvPr/>
+        </p:nvSpPr>
+        <p:spPr>
+          <a:xfrm>
+            <a:off x="7315200" y="5047488"/>
+            <a:ext cx="3108960" cy="548640"/>
+          </a:xfrm>
+          <a:prstGeom prst="rect">
+            <a:avLst/>
+          </a:prstGeom>
+          <a:noFill/>
+          <a:ln/>
+        </p:spPr>
+        <p:txBody>
+          <a:bodyPr wrap="square" lIns="0" tIns="0" rIns="0" bIns="0" rtlCol="0" anchor="ctr"/>
+          <a:lstStyle/>
+          <a:p>
+            <a:pPr indent="0" marL="0">
+              <a:buNone/>
+            </a:pPr>
+            <a:r>
+              <a:rPr lang="en-US" sz="1100" dirty="0">
+                <a:solidFill>
+                  <a:srgbClr val="6E786B"/>
+                </a:solidFill>
+                <a:latin typeface="맑은 고딕" pitchFamily="34" charset="0"/>
+                <a:ea typeface="맑은 고딕" pitchFamily="34" charset="-122"/>
+                <a:cs typeface="맑은 고딕" pitchFamily="34" charset="-120"/>
+              </a:rPr>
+              <a:t>"오늘 등천동…기온은 최고 34.2도…"</a:t>
+            </a:r>
+            <a:endParaRPr lang="en-US" sz="1100" dirty="0"/>
+          </a:p>
+        </p:txBody>
+      </p:sp>
+      <p:sp>
+        <p:nvSpPr>
+          <p:cNvPr id="43" name="Text 41"/>
+          <p:cNvSpPr/>
+          <p:nvPr/>
+        </p:nvSpPr>
+        <p:spPr>
+          <a:xfrm>
+            <a:off x="10652760" y="5047488"/>
+            <a:ext cx="777240" cy="548640"/>
           </a:xfrm>
           <a:prstGeom prst="rect">
             <a:avLst/>
@@ -4442,7 +4718,7 @@
                 <a:ea typeface="맑은 고딕" pitchFamily="34" charset="-122"/>
                 <a:cs typeface="맑은 고딕" pitchFamily="34" charset="-120"/>
               </a:rPr>
-              <a:t>4,620 ms</a:t>
+              <a:t>통과</a:t>
             </a:r>
             <a:endParaRPr lang="en-US" sz="1300" dirty="0"/>
           </a:p>
@@ -4450,96 +4726,18 @@
       </p:sp>
       <p:sp>
         <p:nvSpPr>
-          <p:cNvPr id="38" name="Text 36"/>
-          <p:cNvSpPr/>
-          <p:nvPr/>
-        </p:nvSpPr>
-        <p:spPr>
-          <a:xfrm>
-            <a:off x="5760720" y="5047488"/>
-            <a:ext cx="4526280" cy="548640"/>
-          </a:xfrm>
-          <a:prstGeom prst="rect">
-            <a:avLst/>
-          </a:prstGeom>
-          <a:noFill/>
-          <a:ln/>
-        </p:spPr>
-        <p:txBody>
-          <a:bodyPr wrap="square" lIns="0" tIns="0" rIns="0" bIns="0" rtlCol="0" anchor="ctr"/>
-          <a:lstStyle/>
-          <a:p>
-            <a:pPr indent="0" marL="0">
-              <a:buNone/>
-            </a:pPr>
-            <a:r>
-              <a:rPr lang="en-US" sz="1250" dirty="0">
-                <a:solidFill>
-                  <a:srgbClr val="6E786B"/>
-                </a:solidFill>
-                <a:latin typeface="맑은 고딕" pitchFamily="34" charset="0"/>
-                <a:ea typeface="맑은 고딕" pitchFamily="34" charset="-122"/>
-                <a:cs typeface="맑은 고딕" pitchFamily="34" charset="-120"/>
-              </a:rPr>
-              <a:t>"오늘 등천동 날씨는… 기온은 최고 34.2도…"</a:t>
-            </a:r>
-            <a:endParaRPr lang="en-US" sz="1250" dirty="0"/>
-          </a:p>
-        </p:txBody>
-      </p:sp>
-      <p:sp>
-        <p:nvSpPr>
-          <p:cNvPr id="39" name="Text 37"/>
-          <p:cNvSpPr/>
-          <p:nvPr/>
-        </p:nvSpPr>
-        <p:spPr>
-          <a:xfrm>
-            <a:off x="10607040" y="5047488"/>
-            <a:ext cx="822960" cy="548640"/>
-          </a:xfrm>
-          <a:prstGeom prst="rect">
-            <a:avLst/>
-          </a:prstGeom>
-          <a:noFill/>
-          <a:ln/>
-        </p:spPr>
-        <p:txBody>
-          <a:bodyPr wrap="square" lIns="0" tIns="0" rIns="0" bIns="0" rtlCol="0" anchor="ctr"/>
-          <a:lstStyle/>
-          <a:p>
-            <a:pPr indent="0" marL="0">
-              <a:buNone/>
-            </a:pPr>
-            <a:r>
-              <a:rPr lang="en-US" sz="1300" b="1" dirty="0">
-                <a:solidFill>
-                  <a:srgbClr val="3A5035"/>
-                </a:solidFill>
-                <a:latin typeface="맑은 고딕" pitchFamily="34" charset="0"/>
-                <a:ea typeface="맑은 고딕" pitchFamily="34" charset="-122"/>
-                <a:cs typeface="맑은 고딕" pitchFamily="34" charset="-120"/>
-              </a:rPr>
-              <a:t>통과</a:t>
-            </a:r>
-            <a:endParaRPr lang="en-US" sz="1300" dirty="0"/>
-          </a:p>
-        </p:txBody>
-      </p:sp>
-      <p:sp>
-        <p:nvSpPr>
-          <p:cNvPr id="40" name="Shape 38"/>
-          <p:cNvSpPr/>
-          <p:nvPr/>
-        </p:nvSpPr>
-        <p:spPr>
-          <a:xfrm>
-            <a:off x="640080" y="5760720"/>
-            <a:ext cx="10881360" cy="713232"/>
+          <p:cNvPr id="44" name="Shape 42"/>
+          <p:cNvSpPr/>
+          <p:nvPr/>
+        </p:nvSpPr>
+        <p:spPr>
+          <a:xfrm>
+            <a:off x="640080" y="5742432"/>
+            <a:ext cx="10881360" cy="804672"/>
           </a:xfrm>
           <a:prstGeom prst="roundRect">
             <a:avLst>
-              <a:gd name="adj" fmla="val 11538"/>
+              <a:gd name="adj" fmla="val 10227"/>
             </a:avLst>
           </a:prstGeom>
           <a:solidFill>
@@ -4555,30 +4753,33 @@
       </p:sp>
       <p:sp>
         <p:nvSpPr>
-          <p:cNvPr id="41" name="Text 39"/>
-          <p:cNvSpPr/>
-          <p:nvPr/>
-        </p:nvSpPr>
-        <p:spPr>
-          <a:xfrm>
-            <a:off x="914400" y="5760720"/>
-            <a:ext cx="10332720" cy="713232"/>
-          </a:xfrm>
-          <a:prstGeom prst="rect">
-            <a:avLst/>
-          </a:prstGeom>
-          <a:noFill/>
-          <a:ln/>
-        </p:spPr>
-        <p:txBody>
-          <a:bodyPr wrap="square" lIns="0" tIns="0" rIns="0" bIns="0" rtlCol="0" anchor="ctr"/>
-          <a:lstStyle/>
-          <a:p>
-            <a:pPr indent="0" marL="0">
-              <a:buNone/>
-            </a:pPr>
-            <a:r>
-              <a:rPr lang="en-US" sz="1250" b="1" dirty="0">
+          <p:cNvPr id="45" name="Text 43"/>
+          <p:cNvSpPr/>
+          <p:nvPr/>
+        </p:nvSpPr>
+        <p:spPr>
+          <a:xfrm>
+            <a:off x="914400" y="5742432"/>
+            <a:ext cx="10332720" cy="804672"/>
+          </a:xfrm>
+          <a:prstGeom prst="rect">
+            <a:avLst/>
+          </a:prstGeom>
+          <a:noFill/>
+          <a:ln/>
+        </p:spPr>
+        <p:txBody>
+          <a:bodyPr wrap="square" lIns="0" tIns="0" rIns="0" bIns="0" rtlCol="0" anchor="ctr"/>
+          <a:lstStyle/>
+          <a:p>
+            <a:pPr indent="0" marL="0">
+              <a:lnSpc>
+                <a:spcPts val="1900"/>
+              </a:lnSpc>
+              <a:buNone/>
+            </a:pPr>
+            <a:r>
+              <a:rPr lang="en-US" sz="1200" b="1" dirty="0">
                 <a:solidFill>
                   <a:srgbClr val="3A5035"/>
                 </a:solidFill>
@@ -4586,13 +4787,16 @@
                 <a:ea typeface="맑은 고딕" pitchFamily="34" charset="-122"/>
                 <a:cs typeface="맑은 고딕" pitchFamily="34" charset="-120"/>
               </a:rPr>
-              <a:t>받아쓰기 오류는 감수합니다 (의도된 설계) — </a:t>
-            </a:r>
-            <a:pPr indent="0" marL="0">
-              <a:buNone/>
-            </a:pPr>
-            <a:r>
-              <a:rPr lang="en-US" sz="1250" dirty="0">
+              <a:t>경로별 기준선이 다르므로 시나리오별 추이로 봅니다 — </a:t>
+            </a:r>
+            <a:pPr indent="0" marL="0">
+              <a:lnSpc>
+                <a:spcPts val="1900"/>
+              </a:lnSpc>
+              <a:buNone/>
+            </a:pPr>
+            <a:r>
+              <a:rPr lang="en-US" sz="1200" dirty="0">
                 <a:solidFill>
                   <a:srgbClr val="1F2420"/>
                 </a:solidFill>
@@ -4600,9 +4804,44 @@
                 <a:ea typeface="맑은 고딕" pitchFamily="34" charset="-122"/>
                 <a:cs typeface="맑은 고딕" pitchFamily="34" charset="-120"/>
               </a:rPr>
-              <a:t>“등촌동”을 “등천동”으로 잘못 듣지만 기대 키워드(날씨·기온)가 살아남아 판정은 정확합니다. 키워드를 여러 개 두어 오인식 한 번이 오판정이 되지 않게 했습니다.</a:t>
-            </a:r>
-            <a:endParaRPr lang="en-US" sz="1250" dirty="0"/>
+              <a:t>“시간 질문이 3초”는 절대값으론 정상이어도 이상 신호입니다. 날씨만 느려지면 외부 연동, 전부 느려지면 엔진·인프라로 지연 위치를 특정합니다.
+</a:t>
+            </a:r>
+            <a:pPr indent="0" marL="0">
+              <a:lnSpc>
+                <a:spcPts val="1900"/>
+              </a:lnSpc>
+              <a:buNone/>
+            </a:pPr>
+            <a:r>
+              <a:rPr lang="en-US" sz="1200" b="1" dirty="0">
+                <a:solidFill>
+                  <a:srgbClr val="3A5035"/>
+                </a:solidFill>
+                <a:latin typeface="맑은 고딕" pitchFamily="34" charset="0"/>
+                <a:ea typeface="맑은 고딕" pitchFamily="34" charset="-122"/>
+                <a:cs typeface="맑은 고딕" pitchFamily="34" charset="-120"/>
+              </a:rPr>
+              <a:t>받아쓰기 오류는 감수합니다 — </a:t>
+            </a:r>
+            <a:pPr indent="0" marL="0">
+              <a:lnSpc>
+                <a:spcPts val="1900"/>
+              </a:lnSpc>
+              <a:buNone/>
+            </a:pPr>
+            <a:r>
+              <a:rPr lang="en-US" sz="1200" dirty="0">
+                <a:solidFill>
+                  <a:srgbClr val="1F2420"/>
+                </a:solidFill>
+                <a:latin typeface="맑은 고딕" pitchFamily="34" charset="0"/>
+                <a:ea typeface="맑은 고딕" pitchFamily="34" charset="-122"/>
+                <a:cs typeface="맑은 고딕" pitchFamily="34" charset="-120"/>
+              </a:rPr>
+              <a:t>“등촌동”→“등천동” 오인식에도 기대 키워드(날씨·기온)가 살아남아 판정은 정확합니다 (다중 키워드 완충).</a:t>
+            </a:r>
+            <a:endParaRPr lang="en-US" sz="1200" dirty="0"/>
           </a:p>
         </p:txBody>
       </p:sp>
@@ -4671,7 +4910,7 @@
                 <a:ea typeface="맑은 고딕" pitchFamily="34" charset="-122"/>
                 <a:cs typeface="맑은 고딕" pitchFamily="34" charset="-120"/>
               </a:rPr>
-              <a:t>무엇을 받게 되는가</a:t>
+              <a:t>운영 산출물 — 요약 메일 · 관리자 탭</a:t>
             </a:r>
             <a:endParaRPr lang="en-US" sz="3200" dirty="0"/>
           </a:p>
@@ -5345,7 +5584,7 @@
                 <a:ea typeface="맑은 고딕" pitchFamily="34" charset="-122"/>
                 <a:cs typeface="맑은 고딕" pitchFamily="34" charset="-120"/>
               </a:rPr>
-              <a:t>실패 메일을 받으면 무엇을 하나</a:t>
+              <a:t>실패 알림 대응 가이드</a:t>
             </a:r>
             <a:endParaRPr lang="en-US" sz="3200" dirty="0"/>
           </a:p>
@@ -5384,7 +5623,7 @@
                 <a:ea typeface="맑은 고딕" pitchFamily="34" charset="-122"/>
                 <a:cs typeface="맑은 고딕" pitchFamily="34" charset="-120"/>
               </a:rPr>
-              <a:t>팀원용 대응 가이드</a:t>
+              <a:t>알림 문구별 첫 조치 — 실패 1건이 곧 장애는 아닙니다</a:t>
             </a:r>
             <a:endParaRPr lang="en-US" sz="1400" dirty="0"/>
           </a:p>
@@ -6259,7 +6498,7 @@
                 <a:ea typeface="맑은 고딕" pitchFamily="34" charset="-122"/>
                 <a:cs typeface="맑은 고딕" pitchFamily="34" charset="-120"/>
               </a:rPr>
-              <a:t>비용과 남은 계획</a:t>
+              <a:t>소요 비용 및 향후 계획</a:t>
             </a:r>
             <a:endParaRPr lang="en-US" sz="3200" dirty="0"/>
           </a:p>
@@ -7128,7 +7367,7 @@
                 <a:ea typeface="맑은 고딕" pitchFamily="34" charset="-122"/>
                 <a:cs typeface="맑은 고딕" pitchFamily="34" charset="-120"/>
               </a:rPr>
-              <a:t>USB 웹캠으로 가전 제어 전·후 촬영 판정</a:t>
+              <a:t>가전 제어 전·후 촬영 판정 + 단독 제어 vs 서비스 연동 응답 시간 비교</a:t>
             </a:r>
             <a:endParaRPr lang="en-US" sz="1150" dirty="0"/>
           </a:p>
@@ -9444,7 +9683,7 @@
                 <a:ea typeface="맑은 고딕" pitchFamily="34" charset="-122"/>
                 <a:cs typeface="맑은 고딕" pitchFamily="34" charset="-120"/>
               </a:rPr>
-              <a:t>왜 만들었나</a:t>
+              <a:t>추진 배경</a:t>
             </a:r>
             <a:endParaRPr lang="en-US" sz="3200" dirty="0"/>
           </a:p>
@@ -10449,7 +10688,7 @@
                 <a:ea typeface="맑은 고딕" pitchFamily="34" charset="-122"/>
                 <a:cs typeface="맑은 고딕" pitchFamily="34" charset="-120"/>
               </a:rPr>
-              <a:t>무엇을 만들었나</a:t>
+              <a:t>시스템 구성</a:t>
             </a:r>
             <a:endParaRPr lang="en-US" sz="3200" dirty="0"/>
           </a:p>
@@ -11388,7 +11627,7 @@
                 <a:ea typeface="맑은 고딕" pitchFamily="34" charset="-122"/>
                 <a:cs typeface="맑은 고딕" pitchFamily="34" charset="-120"/>
               </a:rPr>
-              <a:t>하루가 어떻게 돌아가는가</a:t>
+              <a:t>일일 운영 흐름</a:t>
             </a:r>
             <a:endParaRPr lang="en-US" sz="3200" dirty="0"/>
           </a:p>
@@ -12774,7 +13013,7 @@
                 <a:ea typeface="맑은 고딕" pitchFamily="34" charset="-122"/>
                 <a:cs typeface="맑은 고딕" pitchFamily="34" charset="-120"/>
               </a:rPr>
-              <a:t>판정 3단계 — 무엇을 잡는가</a:t>
+              <a:t>판정 체계 — 3단계</a:t>
             </a:r>
             <a:endParaRPr lang="en-US" sz="3200" dirty="0"/>
           </a:p>
@@ -14267,7 +14506,7 @@
                 <a:ea typeface="맑은 고딕" pitchFamily="34" charset="-122"/>
                 <a:cs typeface="맑은 고딕" pitchFamily="34" charset="-120"/>
               </a:rPr>
-              <a:t>L1과 L2는 무엇이 다른가</a:t>
+              <a:t>L1 · L2 판정의 역할 구분</a:t>
             </a:r>
             <a:endParaRPr lang="en-US" sz="3200" dirty="0"/>
           </a:p>
@@ -14306,7 +14545,7 @@
                 <a:ea typeface="맑은 고딕" pitchFamily="34" charset="-122"/>
                 <a:cs typeface="맑은 고딕" pitchFamily="34" charset="-120"/>
               </a:rPr>
-              <a:t>가장 많이 받는 질문입니다</a:t>
+              <a:t>같은 실패가 아니라, 서로 다른 계층의 실패를 잡습니다</a:t>
             </a:r>
             <a:endParaRPr lang="en-US" sz="1400" dirty="0"/>
           </a:p>
@@ -15084,7 +15323,7 @@
                 <a:ea typeface="맑은 고딕" pitchFamily="34" charset="-122"/>
                 <a:cs typeface="맑은 고딕" pitchFamily="34" charset="-120"/>
               </a:rPr>
-              <a:t>'응답 시작'이란 무엇인가</a:t>
+              <a:t>'응답 시작' 측정 기준</a:t>
             </a:r>
             <a:endParaRPr lang="en-US" sz="3200" dirty="0"/>
           </a:p>
@@ -16335,7 +16574,7 @@
                 <a:ea typeface="맑은 고딕" pitchFamily="34" charset="-122"/>
                 <a:cs typeface="맑은 고딕" pitchFamily="34" charset="-120"/>
               </a:rPr>
-              <a:t>현장에서 발견하고 해결한 문제</a:t>
+              <a:t>현장 검증 중 발견·개선 사항</a:t>
             </a:r>
             <a:endParaRPr lang="en-US" sz="3200" dirty="0"/>
           </a:p>
@@ -16374,7 +16613,7 @@
                 <a:ea typeface="맑은 고딕" pitchFamily="34" charset="-122"/>
                 <a:cs typeface="맑은 고딕" pitchFamily="34" charset="-120"/>
               </a:rPr>
-              <a:t>설계실에서는 나오지 않고 현장에서만 나온 문제들입니다 — 신뢰도의 근거</a:t>
+              <a:t>설계 단계에서는 나오지 않고 현장에서만 나온 문제들입니다 — 판정 신뢰도의 근거</a:t>
             </a:r>
             <a:endParaRPr lang="en-US" sz="1400" dirty="0"/>
           </a:p>
